--- a/docs/PartInspect.pptx
+++ b/docs/PartInspect.pptx
@@ -212,7 +212,7 @@
           <a:p>
             <a:fld id="{A357D65A-7476-4DC8-A720-DB0FE5A941CD}" type="datetimeFigureOut">
               <a:rPr lang="it-IT" smtClean="0"/>
-              <a:t>12/07/2026</a:t>
+              <a:t>13/07/2026</a:t>
             </a:fld>
             <a:endParaRPr lang="it-IT"/>
           </a:p>
@@ -524,290 +524,16 @@
           <a:lstStyle/>
           <a:p>
             <a:r>
-              <a:rPr lang="it-IT" dirty="0" err="1"/>
-              <a:t>Morphological</a:t>
-            </a:r>
-            <a:r>
-              <a:rPr lang="it-IT" dirty="0"/>
-              <a:t> opening </a:t>
-            </a:r>
-            <a:r>
-              <a:rPr lang="it-IT" dirty="0" err="1"/>
-              <a:t>cleans</a:t>
-            </a:r>
-            <a:r>
-              <a:rPr lang="it-IT" dirty="0"/>
-              <a:t> the image by </a:t>
-            </a:r>
-            <a:r>
-              <a:rPr lang="it-IT" dirty="0" err="1"/>
-              <a:t>deleting</a:t>
-            </a:r>
-            <a:r>
-              <a:rPr lang="it-IT" dirty="0"/>
-              <a:t> </a:t>
-            </a:r>
-            <a:r>
-              <a:rPr lang="it-IT" dirty="0" err="1"/>
-              <a:t>isolated</a:t>
-            </a:r>
-            <a:r>
-              <a:rPr lang="it-IT" dirty="0"/>
-              <a:t> pixels.</a:t>
-            </a:r>
-          </a:p>
-          <a:p>
-            <a:r>
-              <a:rPr lang="it-IT" dirty="0" err="1"/>
-              <a:t>It</a:t>
-            </a:r>
-            <a:r>
-              <a:rPr lang="it-IT" dirty="0"/>
-              <a:t> </a:t>
-            </a:r>
-            <a:r>
-              <a:rPr lang="it-IT" dirty="0" err="1"/>
-              <a:t>is</a:t>
-            </a:r>
-            <a:r>
-              <a:rPr lang="it-IT" dirty="0"/>
-              <a:t> </a:t>
-            </a:r>
-            <a:r>
-              <a:rPr lang="it-IT" dirty="0" err="1"/>
-              <a:t>useful</a:t>
-            </a:r>
-            <a:r>
-              <a:rPr lang="it-IT" dirty="0"/>
-              <a:t> </a:t>
-            </a:r>
-            <a:r>
-              <a:rPr lang="it-IT" dirty="0" err="1"/>
-              <a:t>especially</a:t>
-            </a:r>
-            <a:r>
-              <a:rPr lang="it-IT" dirty="0"/>
-              <a:t> after a </a:t>
-            </a:r>
-            <a:r>
-              <a:rPr lang="it-IT" dirty="0" err="1"/>
-              <a:t>thresholding</a:t>
-            </a:r>
-            <a:r>
-              <a:rPr lang="it-IT" dirty="0"/>
-              <a:t> </a:t>
-            </a:r>
-            <a:r>
-              <a:rPr lang="it-IT" dirty="0" err="1"/>
-              <a:t>operation</a:t>
-            </a:r>
-            <a:r>
-              <a:rPr lang="it-IT" dirty="0"/>
-              <a:t>.</a:t>
-            </a:r>
-          </a:p>
-          <a:p>
-            <a:endParaRPr lang="it-IT" dirty="0"/>
-          </a:p>
-          <a:p>
-            <a:r>
-              <a:rPr lang="it-IT" dirty="0"/>
-              <a:t>The </a:t>
-            </a:r>
-            <a:r>
-              <a:rPr lang="it-IT" dirty="0" err="1"/>
-              <a:t>polygon</a:t>
-            </a:r>
-            <a:r>
-              <a:rPr lang="it-IT" dirty="0"/>
-              <a:t> </a:t>
-            </a:r>
-            <a:r>
-              <a:rPr lang="it-IT" dirty="0" err="1"/>
-              <a:t>approximation</a:t>
-            </a:r>
-            <a:r>
-              <a:rPr lang="it-IT" dirty="0"/>
-              <a:t> </a:t>
-            </a:r>
-            <a:r>
-              <a:rPr lang="it-IT" dirty="0" err="1"/>
-              <a:t>is</a:t>
-            </a:r>
-            <a:r>
-              <a:rPr lang="it-IT" dirty="0"/>
-              <a:t> </a:t>
-            </a:r>
-            <a:r>
-              <a:rPr lang="it-IT" dirty="0" err="1"/>
-              <a:t>based</a:t>
-            </a:r>
-            <a:r>
-              <a:rPr lang="it-IT" dirty="0"/>
-              <a:t> on the Douglas-</a:t>
-            </a:r>
-            <a:r>
-              <a:rPr lang="it-IT" dirty="0" err="1"/>
-              <a:t>Peucker</a:t>
-            </a:r>
-            <a:r>
-              <a:rPr lang="it-IT" dirty="0"/>
-              <a:t> </a:t>
-            </a:r>
-            <a:r>
-              <a:rPr lang="it-IT" dirty="0" err="1"/>
-              <a:t>algorithm</a:t>
-            </a:r>
-            <a:r>
-              <a:rPr lang="it-IT" dirty="0"/>
-              <a:t>, and </a:t>
-            </a:r>
-            <a:r>
-              <a:rPr lang="it-IT" dirty="0" err="1"/>
-              <a:t>finds</a:t>
-            </a:r>
-            <a:r>
-              <a:rPr lang="it-IT" dirty="0"/>
-              <a:t> the </a:t>
-            </a:r>
-            <a:r>
-              <a:rPr lang="it-IT" dirty="0" err="1"/>
-              <a:t>polygon</a:t>
-            </a:r>
-            <a:r>
-              <a:rPr lang="it-IT" dirty="0"/>
-              <a:t> </a:t>
-            </a:r>
-            <a:r>
-              <a:rPr lang="it-IT" dirty="0" err="1"/>
-              <a:t>which</a:t>
-            </a:r>
-            <a:r>
-              <a:rPr lang="it-IT" dirty="0"/>
-              <a:t> </a:t>
-            </a:r>
-            <a:r>
-              <a:rPr lang="it-IT" dirty="0" err="1"/>
-              <a:t>contains</a:t>
-            </a:r>
-            <a:r>
-              <a:rPr lang="it-IT" dirty="0"/>
-              <a:t> </a:t>
-            </a:r>
-            <a:r>
-              <a:rPr lang="it-IT" dirty="0" err="1"/>
-              <a:t>all</a:t>
-            </a:r>
-            <a:r>
-              <a:rPr lang="it-IT" dirty="0"/>
-              <a:t> the </a:t>
-            </a:r>
-            <a:r>
-              <a:rPr lang="it-IT" dirty="0" err="1"/>
-              <a:t>object</a:t>
-            </a:r>
-            <a:r>
-              <a:rPr lang="it-IT" dirty="0"/>
-              <a:t> pixels.</a:t>
-            </a:r>
-            <a:endParaRPr lang="it-IT" u="sng" dirty="0"/>
-          </a:p>
-          <a:p>
-            <a:r>
-              <a:rPr lang="it-IT" u="none" dirty="0" err="1"/>
-              <a:t>It</a:t>
-            </a:r>
-            <a:r>
-              <a:rPr lang="it-IT" u="none" dirty="0"/>
-              <a:t> </a:t>
-            </a:r>
-            <a:r>
-              <a:rPr lang="it-IT" u="none" dirty="0" err="1"/>
-              <a:t>reduces</a:t>
-            </a:r>
-            <a:r>
-              <a:rPr lang="it-IT" u="none" dirty="0"/>
-              <a:t> the image to just the </a:t>
-            </a:r>
-            <a:r>
-              <a:rPr lang="it-IT" u="none" dirty="0" err="1"/>
-              <a:t>vertices</a:t>
-            </a:r>
-            <a:r>
-              <a:rPr lang="it-IT" u="none" dirty="0"/>
-              <a:t> of the </a:t>
-            </a:r>
-            <a:r>
-              <a:rPr lang="it-IT" u="none" dirty="0" err="1"/>
-              <a:t>borders</a:t>
-            </a:r>
-            <a:r>
-              <a:rPr lang="it-IT" u="none" dirty="0"/>
-              <a:t>, so </a:t>
-            </a:r>
-            <a:r>
-              <a:rPr lang="it-IT" u="none" dirty="0" err="1"/>
-              <a:t>it</a:t>
-            </a:r>
-            <a:r>
-              <a:rPr lang="it-IT" u="none" dirty="0"/>
-              <a:t> </a:t>
-            </a:r>
-            <a:r>
-              <a:rPr lang="it-IT" u="none" dirty="0" err="1"/>
-              <a:t>keeps</a:t>
-            </a:r>
-            <a:r>
-              <a:rPr lang="it-IT" u="none" dirty="0"/>
-              <a:t> the </a:t>
-            </a:r>
-            <a:r>
-              <a:rPr lang="it-IT" u="none" dirty="0" err="1"/>
-              <a:t>shape</a:t>
-            </a:r>
-            <a:r>
-              <a:rPr lang="it-IT" u="none" dirty="0"/>
-              <a:t> </a:t>
-            </a:r>
-            <a:r>
-              <a:rPr lang="it-IT" u="none" dirty="0" err="1"/>
-              <a:t>without</a:t>
-            </a:r>
-            <a:r>
-              <a:rPr lang="it-IT" u="none" dirty="0"/>
-              <a:t> </a:t>
-            </a:r>
-            <a:r>
-              <a:rPr lang="it-IT" u="none" dirty="0" err="1"/>
-              <a:t>considering</a:t>
-            </a:r>
-            <a:r>
-              <a:rPr lang="it-IT" u="none" dirty="0"/>
-              <a:t> </a:t>
-            </a:r>
-            <a:r>
-              <a:rPr lang="it-IT" u="none" dirty="0" err="1"/>
-              <a:t>all</a:t>
-            </a:r>
-            <a:r>
-              <a:rPr lang="it-IT" u="none" dirty="0"/>
-              <a:t> the image pixels (</a:t>
-            </a:r>
-            <a:r>
-              <a:rPr lang="it-IT" u="none" dirty="0" err="1"/>
-              <a:t>reducing</a:t>
-            </a:r>
-            <a:r>
-              <a:rPr lang="it-IT" u="none" dirty="0"/>
-              <a:t> the </a:t>
-            </a:r>
-            <a:r>
-              <a:rPr lang="it-IT" u="none" dirty="0" err="1"/>
-              <a:t>complexity</a:t>
-            </a:r>
-            <a:r>
-              <a:rPr lang="it-IT" u="none" dirty="0"/>
-              <a:t>).</a:t>
+              <a:rPr lang="en-US" noProof="0" dirty="0"/>
+              <a:t>In automation, this kind of solenoid actuator is often called «</a:t>
+            </a:r>
+            <a:r>
+              <a:rPr lang="en-US" b="1" noProof="0" dirty="0"/>
+              <a:t>Reject Solenoid</a:t>
+            </a:r>
+            <a:r>
+              <a:rPr lang="en-US" b="0" noProof="0" dirty="0"/>
+              <a:t>».</a:t>
             </a:r>
           </a:p>
         </p:txBody>
@@ -829,7 +555,7 @@
           <a:p>
             <a:fld id="{E7F46757-F6AF-4C10-AC72-994401E30A9D}" type="slidenum">
               <a:rPr lang="it-IT" smtClean="0"/>
-              <a:t>4</a:t>
+              <a:t>2</a:t>
             </a:fld>
             <a:endParaRPr lang="it-IT"/>
           </a:p>
@@ -838,7 +564,7 @@
     </p:spTree>
     <p:extLst>
       <p:ext uri="{BB962C8B-B14F-4D97-AF65-F5344CB8AC3E}">
-        <p14:creationId xmlns:p14="http://schemas.microsoft.com/office/powerpoint/2010/main" val="336793421"/>
+        <p14:creationId xmlns:p14="http://schemas.microsoft.com/office/powerpoint/2010/main" val="1875613397"/>
       </p:ext>
     </p:extLst>
   </p:cSld>
@@ -893,155 +619,140 @@
           <a:lstStyle/>
           <a:p>
             <a:r>
-              <a:rPr lang="it-IT" dirty="0"/>
-              <a:t>All </a:t>
-            </a:r>
-            <a:r>
-              <a:rPr lang="it-IT" dirty="0" err="1"/>
-              <a:t>nodes</a:t>
-            </a:r>
-            <a:r>
-              <a:rPr lang="it-IT" dirty="0"/>
-              <a:t> (a part from the dummy camera </a:t>
-            </a:r>
-            <a:r>
-              <a:rPr lang="it-IT" dirty="0" err="1"/>
-              <a:t>node</a:t>
-            </a:r>
-            <a:r>
-              <a:rPr lang="it-IT" dirty="0"/>
-              <a:t>) works </a:t>
-            </a:r>
-            <a:r>
-              <a:rPr lang="it-IT" dirty="0" err="1"/>
-              <a:t>at</a:t>
-            </a:r>
-            <a:r>
-              <a:rPr lang="it-IT" dirty="0"/>
-              <a:t> the </a:t>
-            </a:r>
-            <a:r>
-              <a:rPr lang="it-IT" dirty="0" err="1"/>
-              <a:t>same</a:t>
-            </a:r>
-            <a:r>
-              <a:rPr lang="it-IT" dirty="0"/>
-              <a:t> frequency: 20Hz</a:t>
-            </a:r>
-          </a:p>
-          <a:p>
-            <a:r>
-              <a:rPr lang="it-IT" dirty="0" err="1"/>
-              <a:t>However</a:t>
-            </a:r>
-            <a:r>
-              <a:rPr lang="it-IT" dirty="0"/>
-              <a:t>, </a:t>
-            </a:r>
-            <a:r>
-              <a:rPr lang="it-IT" dirty="0" err="1"/>
-              <a:t>this</a:t>
-            </a:r>
-            <a:r>
-              <a:rPr lang="it-IT" dirty="0"/>
-              <a:t> </a:t>
-            </a:r>
-            <a:r>
-              <a:rPr lang="it-IT" dirty="0" err="1"/>
-              <a:t>is</a:t>
-            </a:r>
-            <a:r>
-              <a:rPr lang="it-IT" dirty="0"/>
-              <a:t> </a:t>
-            </a:r>
-            <a:r>
-              <a:rPr lang="it-IT" dirty="0" err="1"/>
-              <a:t>not</a:t>
-            </a:r>
-            <a:r>
-              <a:rPr lang="it-IT" dirty="0"/>
-              <a:t> </a:t>
-            </a:r>
-            <a:r>
-              <a:rPr lang="it-IT" dirty="0" err="1"/>
-              <a:t>mandatory</a:t>
-            </a:r>
-            <a:r>
-              <a:rPr lang="it-IT" dirty="0"/>
-              <a:t>: controller and pusher can </a:t>
-            </a:r>
-            <a:r>
-              <a:rPr lang="it-IT" dirty="0" err="1"/>
-              <a:t>also</a:t>
-            </a:r>
-            <a:r>
-              <a:rPr lang="it-IT" dirty="0"/>
-              <a:t> work </a:t>
-            </a:r>
-            <a:r>
-              <a:rPr lang="it-IT" dirty="0" err="1"/>
-              <a:t>at</a:t>
-            </a:r>
-            <a:r>
-              <a:rPr lang="it-IT" dirty="0"/>
-              <a:t> a </a:t>
-            </a:r>
-            <a:r>
-              <a:rPr lang="it-IT" dirty="0" err="1"/>
-              <a:t>different</a:t>
-            </a:r>
-            <a:r>
-              <a:rPr lang="it-IT" dirty="0"/>
-              <a:t> frequency.</a:t>
-            </a:r>
-          </a:p>
-          <a:p>
-            <a:endParaRPr lang="it-IT" dirty="0"/>
-          </a:p>
-          <a:p>
-            <a:r>
-              <a:rPr lang="it-IT" dirty="0"/>
-              <a:t>Dummy camera </a:t>
-            </a:r>
-            <a:r>
-              <a:rPr lang="it-IT" dirty="0" err="1"/>
-              <a:t>node</a:t>
-            </a:r>
-            <a:r>
-              <a:rPr lang="it-IT" dirty="0"/>
-              <a:t> </a:t>
-            </a:r>
-            <a:r>
-              <a:rPr lang="it-IT" dirty="0" err="1"/>
-              <a:t>generates</a:t>
-            </a:r>
-            <a:r>
-              <a:rPr lang="it-IT" dirty="0"/>
-              <a:t> an image </a:t>
-            </a:r>
-            <a:r>
-              <a:rPr lang="it-IT" dirty="0" err="1"/>
-              <a:t>every</a:t>
-            </a:r>
-            <a:r>
-              <a:rPr lang="it-IT" dirty="0"/>
-              <a:t> 2 seconds, so </a:t>
-            </a:r>
-            <a:r>
-              <a:rPr lang="it-IT" dirty="0" err="1"/>
-              <a:t>it</a:t>
-            </a:r>
-            <a:r>
-              <a:rPr lang="it-IT" dirty="0"/>
-              <a:t> works </a:t>
-            </a:r>
-            <a:r>
-              <a:rPr lang="it-IT" dirty="0" err="1"/>
-              <a:t>at</a:t>
-            </a:r>
-            <a:r>
-              <a:rPr lang="it-IT" dirty="0"/>
-              <a:t> the frequency of 0.5Hz</a:t>
+              <a:rPr lang="en-US" noProof="0" dirty="0"/>
+              <a:t>Morphological opening cleans the image by deleting isolated pixels.</a:t>
+            </a:r>
+          </a:p>
+          <a:p>
+            <a:r>
+              <a:rPr lang="en-US" noProof="0" dirty="0"/>
+              <a:t>It is useful especially after a thresholding operation.</a:t>
+            </a:r>
+          </a:p>
+          <a:p>
+            <a:endParaRPr lang="en-US" noProof="0" dirty="0"/>
+          </a:p>
+          <a:p>
+            <a:r>
+              <a:rPr lang="en-US" noProof="0" dirty="0"/>
+              <a:t>The polygon approximation is based on the Douglas-</a:t>
+            </a:r>
+            <a:r>
+              <a:rPr lang="en-US" noProof="0" dirty="0" err="1"/>
+              <a:t>Peucker</a:t>
+            </a:r>
+            <a:r>
+              <a:rPr lang="en-US" noProof="0" dirty="0"/>
+              <a:t> algorithm, and finds the polygon which contains all the object pixels.</a:t>
+            </a:r>
+            <a:endParaRPr lang="en-US" u="sng" noProof="0" dirty="0"/>
+          </a:p>
+          <a:p>
+            <a:r>
+              <a:rPr lang="en-US" u="none" noProof="0" dirty="0"/>
+              <a:t>It reduces the image to just the vertices of the borders, so it keeps the shape without considering all the image pixels (reducing the complexity).</a:t>
+            </a:r>
+          </a:p>
+        </p:txBody>
+      </p:sp>
+      <p:sp>
+        <p:nvSpPr>
+          <p:cNvPr id="4" name="Segnaposto numero diapositiva 3"/>
+          <p:cNvSpPr>
+            <a:spLocks noGrp="1"/>
+          </p:cNvSpPr>
+          <p:nvPr>
+            <p:ph type="sldNum" sz="quarter" idx="5"/>
+          </p:nvPr>
+        </p:nvSpPr>
+        <p:spPr/>
+        <p:txBody>
+          <a:bodyPr/>
+          <a:lstStyle/>
+          <a:p>
+            <a:fld id="{E7F46757-F6AF-4C10-AC72-994401E30A9D}" type="slidenum">
+              <a:rPr lang="it-IT" smtClean="0"/>
+              <a:t>4</a:t>
+            </a:fld>
+            <a:endParaRPr lang="it-IT"/>
+          </a:p>
+        </p:txBody>
+      </p:sp>
+    </p:spTree>
+    <p:extLst>
+      <p:ext uri="{BB962C8B-B14F-4D97-AF65-F5344CB8AC3E}">
+        <p14:creationId xmlns:p14="http://schemas.microsoft.com/office/powerpoint/2010/main" val="336793421"/>
+      </p:ext>
+    </p:extLst>
+  </p:cSld>
+  <p:clrMapOvr>
+    <a:masterClrMapping/>
+  </p:clrMapOvr>
+</p:notes>
+</file>
+
+<file path=ppt/notesSlides/notesSlide3.xml><?xml version="1.0" encoding="utf-8"?>
+<p:notes xmlns:a="http://schemas.openxmlformats.org/drawingml/2006/main" xmlns:r="http://schemas.openxmlformats.org/officeDocument/2006/relationships" xmlns:p="http://schemas.openxmlformats.org/presentationml/2006/main">
+  <p:cSld>
+    <p:spTree>
+      <p:nvGrpSpPr>
+        <p:cNvPr id="1" name=""/>
+        <p:cNvGrpSpPr/>
+        <p:nvPr/>
+      </p:nvGrpSpPr>
+      <p:grpSpPr>
+        <a:xfrm>
+          <a:off x="0" y="0"/>
+          <a:ext cx="0" cy="0"/>
+          <a:chOff x="0" y="0"/>
+          <a:chExt cx="0" cy="0"/>
+        </a:xfrm>
+      </p:grpSpPr>
+      <p:sp>
+        <p:nvSpPr>
+          <p:cNvPr id="2" name="Segnaposto immagine diapositiva 1"/>
+          <p:cNvSpPr>
+            <a:spLocks noGrp="1" noRot="1" noChangeAspect="1"/>
+          </p:cNvSpPr>
+          <p:nvPr>
+            <p:ph type="sldImg"/>
+          </p:nvPr>
+        </p:nvSpPr>
+        <p:spPr/>
+      </p:sp>
+      <p:sp>
+        <p:nvSpPr>
+          <p:cNvPr id="3" name="Segnaposto note 2"/>
+          <p:cNvSpPr>
+            <a:spLocks noGrp="1"/>
+          </p:cNvSpPr>
+          <p:nvPr>
+            <p:ph type="body" idx="1"/>
+          </p:nvPr>
+        </p:nvSpPr>
+        <p:spPr/>
+        <p:txBody>
+          <a:bodyPr/>
+          <a:lstStyle/>
+          <a:p>
+            <a:r>
+              <a:rPr lang="en-US" noProof="0" dirty="0"/>
+              <a:t>All nodes (a part from the dummy camera node) works at the same frequency: 20 Hz</a:t>
+            </a:r>
+          </a:p>
+          <a:p>
+            <a:r>
+              <a:rPr lang="en-US" noProof="0" dirty="0"/>
+              <a:t>However, this is not mandatory: controller and pusher can also work at a different frequency.</a:t>
+            </a:r>
+          </a:p>
+          <a:p>
+            <a:endParaRPr lang="en-US" noProof="0" dirty="0"/>
+          </a:p>
+          <a:p>
+            <a:r>
+              <a:rPr lang="en-US" noProof="0" dirty="0"/>
+              <a:t>Dummy camera node generates an image every 2 seconds, so it works at the frequency of 0.5 Hz</a:t>
             </a:r>
           </a:p>
         </p:txBody>
@@ -1238,7 +949,7 @@
           <a:p>
             <a:fld id="{6444479B-705B-4489-957E-7E8A228BDFA0}" type="datetime1">
               <a:rPr lang="en-US" smtClean="0"/>
-              <a:t>7/12/2026</a:t>
+              <a:t>7/13/2026</a:t>
             </a:fld>
             <a:endParaRPr lang="en-US"/>
           </a:p>
@@ -1438,7 +1149,7 @@
           <a:p>
             <a:fld id="{C07B66AD-7C08-490A-ADA4-B47E10FB2407}" type="datetime1">
               <a:rPr lang="en-US" smtClean="0"/>
-              <a:t>7/12/2026</a:t>
+              <a:t>7/13/2026</a:t>
             </a:fld>
             <a:endParaRPr lang="en-US"/>
           </a:p>
@@ -1697,7 +1408,7 @@
           <a:p>
             <a:fld id="{05B95027-4255-49E7-9841-CD21BCC99996}" type="datetime1">
               <a:rPr lang="en-US" smtClean="0"/>
-              <a:t>7/12/2026</a:t>
+              <a:t>7/13/2026</a:t>
             </a:fld>
             <a:endParaRPr lang="en-US"/>
           </a:p>
@@ -1938,7 +1649,7 @@
           <a:p>
             <a:fld id="{9F89F774-3FA6-43B8-9241-99959C8FD463}" type="datetime1">
               <a:rPr lang="en-US" smtClean="0"/>
-              <a:t>7/12/2026</a:t>
+              <a:t>7/13/2026</a:t>
             </a:fld>
             <a:endParaRPr lang="en-US"/>
           </a:p>
@@ -2265,7 +1976,7 @@
           <a:p>
             <a:fld id="{F9504452-5DCC-4FE2-A5C9-8A5EF6714D65}" type="datetime1">
               <a:rPr lang="en-US" smtClean="0"/>
-              <a:t>7/12/2026</a:t>
+              <a:t>7/13/2026</a:t>
             </a:fld>
             <a:endParaRPr lang="en-US"/>
           </a:p>
@@ -2575,7 +2286,7 @@
           <a:p>
             <a:fld id="{E579ABC2-0180-4F3A-A895-A85BC724D472}" type="datetime1">
               <a:rPr lang="en-US" smtClean="0"/>
-              <a:t>7/12/2026</a:t>
+              <a:t>7/13/2026</a:t>
             </a:fld>
             <a:endParaRPr lang="en-US"/>
           </a:p>
@@ -2993,7 +2704,7 @@
           <a:p>
             <a:fld id="{6AEEA9BA-4E8F-439E-BEA4-91FBA01E3F5F}" type="datetime1">
               <a:rPr lang="en-US" smtClean="0"/>
-              <a:t>7/12/2026</a:t>
+              <a:t>7/13/2026</a:t>
             </a:fld>
             <a:endParaRPr lang="en-US"/>
           </a:p>
@@ -3135,7 +2846,7 @@
           <a:p>
             <a:fld id="{BE15BF18-0007-481C-AA29-413124BC3EE7}" type="datetime1">
               <a:rPr lang="en-US" smtClean="0"/>
-              <a:t>7/12/2026</a:t>
+              <a:t>7/13/2026</a:t>
             </a:fld>
             <a:endParaRPr lang="en-US"/>
           </a:p>
@@ -3297,7 +3008,7 @@
           <a:p>
             <a:fld id="{09BE9870-3748-43AD-B547-02A075CB4A1D}" type="datetime1">
               <a:rPr lang="en-US" smtClean="0"/>
-              <a:t>7/12/2026</a:t>
+              <a:t>7/13/2026</a:t>
             </a:fld>
             <a:endParaRPr lang="en-US"/>
           </a:p>
@@ -3614,7 +3325,7 @@
           <a:p>
             <a:fld id="{558E7897-33C5-4F1A-9307-D068E37F3DC7}" type="datetime1">
               <a:rPr lang="en-US" smtClean="0"/>
-              <a:t>7/12/2026</a:t>
+              <a:t>7/13/2026</a:t>
             </a:fld>
             <a:endParaRPr lang="en-US"/>
           </a:p>
@@ -3909,7 +3620,7 @@
           <a:p>
             <a:fld id="{82E171BA-CC09-47C8-A6DF-F5C5CB59CEEC}" type="datetime1">
               <a:rPr lang="en-US" smtClean="0"/>
-              <a:t>7/12/2026</a:t>
+              <a:t>7/13/2026</a:t>
             </a:fld>
             <a:endParaRPr lang="en-US"/>
           </a:p>
@@ -4150,7 +3861,7 @@
           <a:p>
             <a:fld id="{7DA38F49-B3E2-4BF0-BEC7-C30D34ABBB8D}" type="datetime1">
               <a:rPr lang="en-US" smtClean="0"/>
-              <a:t>7/12/2026</a:t>
+              <a:t>7/13/2026</a:t>
             </a:fld>
             <a:endParaRPr lang="en-US"/>
           </a:p>
@@ -5060,7 +4771,7 @@
           <p:nvPr/>
         </p:nvPicPr>
         <p:blipFill>
-          <a:blip r:embed="rId2"/>
+          <a:blip r:embed="rId3"/>
           <a:srcRect l="10012" r="42775" b="-3"/>
           <a:stretch>
             <a:fillRect/>
@@ -5184,6 +4895,11 @@
               <a:rPr lang="en-US" sz="1800" b="1" noProof="0" dirty="0"/>
               <a:t>SOLENOID ACTUATOR</a:t>
             </a:r>
+            <a:r>
+              <a:rPr lang="en-US" sz="1800" dirty="0"/>
+              <a:t> (which can push objects away)</a:t>
+            </a:r>
+            <a:endParaRPr lang="en-US" sz="1800" b="1" noProof="0" dirty="0"/>
           </a:p>
           <a:p>
             <a:r>
@@ -5239,7 +4955,7 @@
         </p:nvSpPr>
         <p:spPr>
           <a:xfrm>
-            <a:off x="5499594" y="5617028"/>
+            <a:off x="5426925" y="5617028"/>
             <a:ext cx="2513610" cy="365760"/>
           </a:xfrm>
           <a:prstGeom prst="rect">
@@ -5281,8 +4997,8 @@
         </p:nvSpPr>
         <p:spPr>
           <a:xfrm>
-            <a:off x="8676498" y="5477164"/>
-            <a:ext cx="2743200" cy="646331"/>
+            <a:off x="8252603" y="5610972"/>
+            <a:ext cx="2743200" cy="369332"/>
           </a:xfrm>
           <a:prstGeom prst="rect">
             <a:avLst/>
@@ -5306,7 +5022,7 @@
                   </a:schemeClr>
                 </a:solidFill>
               </a:rPr>
-              <a:t>Bad parts (pushed away from the solenoid)</a:t>
+              <a:t>Defective parts (rejected)</a:t>
             </a:r>
           </a:p>
         </p:txBody>
@@ -5328,7 +5044,7 @@
         <p:spPr>
           <a:xfrm>
             <a:off x="8483936" y="4820281"/>
-            <a:ext cx="732732" cy="545006"/>
+            <a:ext cx="781177" cy="691584"/>
           </a:xfrm>
           <a:prstGeom prst="straightConnector1">
             <a:avLst/>
@@ -5373,8 +5089,8 @@
         </p:nvCxnSpPr>
         <p:spPr>
           <a:xfrm flipH="1">
-            <a:off x="6848917" y="4839194"/>
-            <a:ext cx="248280" cy="647206"/>
+            <a:off x="6758082" y="4839194"/>
+            <a:ext cx="339115" cy="647206"/>
           </a:xfrm>
           <a:prstGeom prst="straightConnector1">
             <a:avLst/>
@@ -7740,6 +7456,26 @@
                 </a:solidFill>
               </a:rPr>
               <a:t>Continuous publishing ensures simulation stability and actuation accuracy</a:t>
+            </a:r>
+          </a:p>
+          <a:p>
+            <a:pPr lvl="1">
+              <a:buFont typeface="Wingdings" panose="05000000000000000000" pitchFamily="2" charset="2"/>
+              <a:buChar char="Ø"/>
+            </a:pPr>
+            <a:endParaRPr lang="en-US" dirty="0">
+              <a:solidFill>
+                <a:schemeClr val="tx1">
+                  <a:lumMod val="50000"/>
+                  <a:lumOff val="50000"/>
+                </a:schemeClr>
+              </a:solidFill>
+            </a:endParaRPr>
+          </a:p>
+          <a:p>
+            <a:r>
+              <a:rPr lang="en-US" dirty="0"/>
+              <a:t>Immediately stops if the check node detects a defective part</a:t>
             </a:r>
           </a:p>
         </p:txBody>
